--- a/output/hackathon-flexclip-en/flexclip-v4/NeonShift_FlexClip_v4_ZH-TW_Review.pptx
+++ b/output/hackathon-flexclip-en/flexclip-v4/NeonShift_FlexClip_v4_ZH-TW_Review.pptx
@@ -15,6 +15,7 @@
     <p:sldId id="263" r:id="rId15"/>
     <p:sldId id="264" r:id="rId16"/>
     <p:sldId id="265" r:id="rId17"/>
+    <p:sldId id="266" r:id="rId18"/>
   </p:sldIdLst>
   <p:sldSz cx="12191999" cy="6858000" type="screen4x3"/>
   <p:notesSz cx="6858000" cy="9144000"/>
@@ -581,7 +582,77 @@
           <a:lstStyle/>
           <a:p>
             <a:r>
-              <a:t>目前不宣稱已有合作或捐款。請透過提交連結查看 Android App、原始碼與評審指南。為自己而動，為棲地同行。</a:t>
+              <a:t>下一步：質押 SKR 可提升任務獎勵，跑鞋等級越高，加成越高。質押獎勵的固定比例，將撥入獨立追蹤的野生動物保育基金。比率尚未定案。</a:t>
+            </a:r>
+          </a:p>
+        </p:txBody>
+      </p:sp>
+      <p:sp>
+        <p:nvSpPr>
+          <p:cNvPr id="4" name="Slide Number Placeholder 3"/>
+          <p:cNvSpPr>
+            <a:spLocks noGrp="1"/>
+          </p:cNvSpPr>
+          <p:nvPr>
+            <p:ph type="sldNum" idx="5" sz="quarter"/>
+          </p:nvPr>
+        </p:nvSpPr>
+        <p:spPr/>
+      </p:sp>
+    </p:spTree>
+  </p:cSld>
+  <p:clrMapOvr>
+    <a:masterClrMapping/>
+  </p:clrMapOvr>
+</p:notes>
+</file>
+
+<file path=ppt/notesSlides/notesSlide11.xml><?xml version="1.0" encoding="utf-8"?>
+<p:notes xmlns:a="http://schemas.openxmlformats.org/drawingml/2006/main" xmlns:p="http://schemas.openxmlformats.org/presentationml/2006/main" xmlns:r="http://schemas.openxmlformats.org/officeDocument/2006/relationships">
+  <p:cSld>
+    <p:spTree>
+      <p:nvGrpSpPr>
+        <p:cNvPr id="1" name=""/>
+        <p:cNvGrpSpPr/>
+        <p:nvPr/>
+      </p:nvGrpSpPr>
+      <p:grpSpPr>
+        <a:xfrm>
+          <a:off x="0" y="0"/>
+          <a:ext cx="0" cy="0"/>
+          <a:chOff x="0" y="0"/>
+          <a:chExt cx="0" cy="0"/>
+        </a:xfrm>
+      </p:grpSpPr>
+      <p:sp>
+        <p:nvSpPr>
+          <p:cNvPr id="2" name="Slide Image Placeholder 1"/>
+          <p:cNvSpPr>
+            <a:spLocks noGrp="1"/>
+          </p:cNvSpPr>
+          <p:nvPr>
+            <p:ph type="sldImg" idx="2"/>
+          </p:nvPr>
+        </p:nvSpPr>
+        <p:spPr/>
+      </p:sp>
+      <p:sp>
+        <p:nvSpPr>
+          <p:cNvPr id="3" name="Notes Placeholder 2"/>
+          <p:cNvSpPr>
+            <a:spLocks noGrp="1"/>
+          </p:cNvSpPr>
+          <p:nvPr>
+            <p:ph type="body" idx="3" sz="quarter"/>
+          </p:nvPr>
+        </p:nvSpPr>
+        <p:spPr/>
+        <p:txBody>
+          <a:bodyPr/>
+          <a:lstStyle/>
+          <a:p>
+            <a:r>
+              <a:t>請透過提交連結查看 Android App、原始碼與評審指南。為自己而動，為棲地同行。</a:t>
             </a:r>
           </a:p>
         </p:txBody>
@@ -1141,7 +1212,7 @@
           <a:lstStyle/>
           <a:p>
             <a:r>
-              <a:t>Wild Guardians 將個人成長連結到保育學習。在地社群試辦、付費活動服務，以及獨立追蹤的保育款項，都是規劃中的方向。</a:t>
+              <a:t>Wild Guardians 將個人成長連結到保育學習。在地社群試辦仍在規劃中。目前不宣稱已有合作或捐款。</a:t>
             </a:r>
           </a:p>
         </p:txBody>
@@ -4283,7 +4354,7 @@
                 </a:solidFill>
                 <a:latin typeface="Heiti TC"/>
               </a:rPr>
-              <a:t>01 / 10</a:t>
+              <a:t>01 / 11</a:t>
             </a:r>
           </a:p>
         </p:txBody>
@@ -4756,7 +4827,1255 @@
                 </a:solidFill>
                 <a:latin typeface="Heiti TC"/>
               </a:rPr>
-              <a:t>10 / 10</a:t>
+              <a:t>10 / 11</a:t>
+            </a:r>
+          </a:p>
+        </p:txBody>
+      </p:sp>
+      <p:sp>
+        <p:nvSpPr>
+          <p:cNvPr id="5" name="TextBox 4"/>
+          <p:cNvSpPr txBox="1"/>
+          <p:nvPr/>
+        </p:nvSpPr>
+        <p:spPr>
+          <a:xfrm>
+            <a:off x="508000" y="1206500"/>
+            <a:ext cx="11176000" cy="1143000"/>
+          </a:xfrm>
+          <a:prstGeom prst="rect">
+            <a:avLst/>
+          </a:prstGeom>
+          <a:noFill/>
+        </p:spPr>
+        <p:txBody>
+          <a:bodyPr wrap="none" lIns="0" rIns="0" tIns="0" bIns="0">
+            <a:spAutoFit/>
+          </a:bodyPr>
+          <a:lstStyle/>
+          <a:p>
+            <a:pPr>
+              <a:lnSpc>
+                <a:spcPts val="4300"/>
+              </a:lnSpc>
+              <a:spcBef>
+                <a:spcPts val="0"/>
+              </a:spcBef>
+              <a:spcAft>
+                <a:spcPts val="0"/>
+              </a:spcAft>
+            </a:pPr>
+            <a:r>
+              <a:rPr sz="3500" b="1">
+                <a:solidFill>
+                  <a:srgbClr val="F3F7FF"/>
+                </a:solidFill>
+                <a:latin typeface="Heiti TC"/>
+              </a:rPr>
+              <a:t>下一步：質押 SKR，</a:t>
+            </a:r>
+          </a:p>
+          <a:p>
+            <a:pPr>
+              <a:lnSpc>
+                <a:spcPts val="4300"/>
+              </a:lnSpc>
+              <a:spcBef>
+                <a:spcPts val="0"/>
+              </a:spcBef>
+              <a:spcAft>
+                <a:spcPts val="0"/>
+              </a:spcAft>
+            </a:pPr>
+            <a:r>
+              <a:rPr sz="3500" b="1">
+                <a:solidFill>
+                  <a:srgbClr val="F3F7FF"/>
+                </a:solidFill>
+                <a:latin typeface="Heiti TC"/>
+              </a:rPr>
+              <a:t>依等級加成。</a:t>
+            </a:r>
+          </a:p>
+        </p:txBody>
+      </p:sp>
+      <p:sp>
+        <p:nvSpPr>
+          <p:cNvPr id="6" name="TextBox 5"/>
+          <p:cNvSpPr txBox="1"/>
+          <p:nvPr/>
+        </p:nvSpPr>
+        <p:spPr>
+          <a:xfrm>
+            <a:off x="539750" y="2984500"/>
+            <a:ext cx="11176000" cy="889000"/>
+          </a:xfrm>
+          <a:prstGeom prst="rect">
+            <a:avLst/>
+          </a:prstGeom>
+          <a:noFill/>
+        </p:spPr>
+        <p:txBody>
+          <a:bodyPr wrap="none" lIns="0" rIns="0" tIns="0" bIns="0">
+            <a:spAutoFit/>
+          </a:bodyPr>
+          <a:lstStyle/>
+          <a:p>
+            <a:pPr>
+              <a:lnSpc>
+                <a:spcPts val="2200"/>
+              </a:lnSpc>
+              <a:spcBef>
+                <a:spcPts val="0"/>
+              </a:spcBef>
+              <a:spcAft>
+                <a:spcPts val="0"/>
+              </a:spcAft>
+            </a:pPr>
+            <a:r>
+              <a:rPr sz="1800" b="0">
+                <a:solidFill>
+                  <a:srgbClr val="A8B6CF"/>
+                </a:solidFill>
+                <a:latin typeface="Heiti TC"/>
+              </a:rPr>
+              <a:t>跑鞋等級越高，質押加成越高。</a:t>
+            </a:r>
+          </a:p>
+          <a:p>
+            <a:pPr>
+              <a:lnSpc>
+                <a:spcPts val="2200"/>
+              </a:lnSpc>
+              <a:spcBef>
+                <a:spcPts val="0"/>
+              </a:spcBef>
+              <a:spcAft>
+                <a:spcPts val="0"/>
+              </a:spcAft>
+            </a:pPr>
+            <a:r>
+              <a:rPr sz="1800" b="0">
+                <a:solidFill>
+                  <a:srgbClr val="A8B6CF"/>
+                </a:solidFill>
+                <a:latin typeface="Heiti TC"/>
+              </a:rPr>
+              <a:t>質押獎勵的固定比例</a:t>
+            </a:r>
+          </a:p>
+          <a:p>
+            <a:pPr>
+              <a:lnSpc>
+                <a:spcPts val="2200"/>
+              </a:lnSpc>
+              <a:spcBef>
+                <a:spcPts val="0"/>
+              </a:spcBef>
+              <a:spcAft>
+                <a:spcPts val="0"/>
+              </a:spcAft>
+            </a:pPr>
+            <a:r>
+              <a:rPr sz="1800" b="0">
+                <a:solidFill>
+                  <a:srgbClr val="A8B6CF"/>
+                </a:solidFill>
+                <a:latin typeface="Heiti TC"/>
+              </a:rPr>
+              <a:t>撥入野生動物保育。</a:t>
+            </a:r>
+          </a:p>
+        </p:txBody>
+      </p:sp>
+      <p:sp>
+        <p:nvSpPr>
+          <p:cNvPr id="7" name="TextBox 6"/>
+          <p:cNvSpPr txBox="1"/>
+          <p:nvPr/>
+        </p:nvSpPr>
+        <p:spPr>
+          <a:xfrm>
+            <a:off x="539750" y="4127500"/>
+            <a:ext cx="11176000" cy="247649"/>
+          </a:xfrm>
+          <a:prstGeom prst="rect">
+            <a:avLst/>
+          </a:prstGeom>
+          <a:noFill/>
+        </p:spPr>
+        <p:txBody>
+          <a:bodyPr wrap="none" lIns="0" rIns="0" tIns="0" bIns="0">
+            <a:spAutoFit/>
+          </a:bodyPr>
+          <a:lstStyle/>
+          <a:p>
+            <a:pPr>
+              <a:lnSpc>
+                <a:spcPts val="1550"/>
+              </a:lnSpc>
+              <a:spcBef>
+                <a:spcPts val="0"/>
+              </a:spcBef>
+              <a:spcAft>
+                <a:spcPts val="0"/>
+              </a:spcAft>
+            </a:pPr>
+            <a:r>
+              <a:rPr sz="1250" b="1">
+                <a:solidFill>
+                  <a:srgbClr val="35E5C5"/>
+                </a:solidFill>
+                <a:latin typeface="Heiti TC"/>
+              </a:rPr>
+              <a:t>規劃中 · 尚未上線 · 比率未定案</a:t>
+            </a:r>
+          </a:p>
+        </p:txBody>
+      </p:sp>
+      <p:sp>
+        <p:nvSpPr>
+          <p:cNvPr id="8" name="TextBox 7"/>
+          <p:cNvSpPr txBox="1"/>
+          <p:nvPr/>
+        </p:nvSpPr>
+        <p:spPr>
+          <a:xfrm>
+            <a:off x="7810499" y="1016000"/>
+            <a:ext cx="3810000" cy="241300"/>
+          </a:xfrm>
+          <a:prstGeom prst="rect">
+            <a:avLst/>
+          </a:prstGeom>
+          <a:noFill/>
+        </p:spPr>
+        <p:txBody>
+          <a:bodyPr wrap="none" lIns="0" rIns="0" tIns="0" bIns="0">
+            <a:spAutoFit/>
+          </a:bodyPr>
+          <a:lstStyle/>
+          <a:p>
+            <a:pPr>
+              <a:lnSpc>
+                <a:spcPts val="1500"/>
+              </a:lnSpc>
+              <a:spcBef>
+                <a:spcPts val="0"/>
+              </a:spcBef>
+              <a:spcAft>
+                <a:spcPts val="0"/>
+              </a:spcAft>
+            </a:pPr>
+            <a:r>
+              <a:rPr sz="1200" b="1">
+                <a:solidFill>
+                  <a:srgbClr val="A8B6CF"/>
+                </a:solidFill>
+                <a:latin typeface="Heiti TC"/>
+              </a:rPr>
+              <a:t>質押加成（示意）</a:t>
+            </a:r>
+          </a:p>
+        </p:txBody>
+      </p:sp>
+      <p:sp>
+        <p:nvSpPr>
+          <p:cNvPr id="9" name="Rectangle 8"/>
+          <p:cNvSpPr/>
+          <p:nvPr/>
+        </p:nvSpPr>
+        <p:spPr>
+          <a:xfrm>
+            <a:off x="7810499" y="1301750"/>
+            <a:ext cx="3810000" cy="482600"/>
+          </a:xfrm>
+          <a:prstGeom prst="rect">
+            <a:avLst/>
+          </a:prstGeom>
+          <a:solidFill>
+            <a:srgbClr val="111A2B"/>
+          </a:solidFill>
+          <a:ln>
+            <a:noFill/>
+          </a:ln>
+        </p:spPr>
+        <p:style>
+          <a:lnRef idx="1">
+            <a:schemeClr val="accent1"/>
+          </a:lnRef>
+          <a:fillRef idx="3">
+            <a:schemeClr val="accent1"/>
+          </a:fillRef>
+          <a:effectRef idx="2">
+            <a:schemeClr val="accent1"/>
+          </a:effectRef>
+          <a:fontRef idx="minor">
+            <a:schemeClr val="lt1"/>
+          </a:fontRef>
+        </p:style>
+        <p:txBody>
+          <a:bodyPr rtlCol="0" anchor="ctr"/>
+          <a:lstStyle/>
+          <a:p>
+            <a:pPr algn="ctr"/>
+          </a:p>
+        </p:txBody>
+      </p:sp>
+      <p:sp>
+        <p:nvSpPr>
+          <p:cNvPr id="10" name="TextBox 9"/>
+          <p:cNvSpPr txBox="1"/>
+          <p:nvPr/>
+        </p:nvSpPr>
+        <p:spPr>
+          <a:xfrm>
+            <a:off x="8001000" y="1441450"/>
+            <a:ext cx="2095499" cy="260350"/>
+          </a:xfrm>
+          <a:prstGeom prst="rect">
+            <a:avLst/>
+          </a:prstGeom>
+          <a:noFill/>
+        </p:spPr>
+        <p:txBody>
+          <a:bodyPr wrap="none" lIns="0" rIns="0" tIns="0" bIns="0">
+            <a:spAutoFit/>
+          </a:bodyPr>
+          <a:lstStyle/>
+          <a:p>
+            <a:pPr>
+              <a:lnSpc>
+                <a:spcPts val="1650"/>
+              </a:lnSpc>
+              <a:spcBef>
+                <a:spcPts val="0"/>
+              </a:spcBef>
+              <a:spcAft>
+                <a:spcPts val="0"/>
+              </a:spcAft>
+            </a:pPr>
+            <a:r>
+              <a:rPr sz="1350" b="1">
+                <a:solidFill>
+                  <a:srgbClr val="F3F7FF"/>
+                </a:solidFill>
+                <a:latin typeface="Heiti TC"/>
+              </a:rPr>
+              <a:t>LV.1 原點</a:t>
+            </a:r>
+          </a:p>
+        </p:txBody>
+      </p:sp>
+      <p:sp>
+        <p:nvSpPr>
+          <p:cNvPr id="11" name="TextBox 10"/>
+          <p:cNvSpPr txBox="1"/>
+          <p:nvPr/>
+        </p:nvSpPr>
+        <p:spPr>
+          <a:xfrm>
+            <a:off x="10795000" y="1441450"/>
+            <a:ext cx="698500" cy="260350"/>
+          </a:xfrm>
+          <a:prstGeom prst="rect">
+            <a:avLst/>
+          </a:prstGeom>
+          <a:noFill/>
+        </p:spPr>
+        <p:txBody>
+          <a:bodyPr wrap="none" lIns="0" rIns="0" tIns="0" bIns="0">
+            <a:spAutoFit/>
+          </a:bodyPr>
+          <a:lstStyle/>
+          <a:p>
+            <a:pPr>
+              <a:lnSpc>
+                <a:spcPts val="1650"/>
+              </a:lnSpc>
+              <a:spcBef>
+                <a:spcPts val="0"/>
+              </a:spcBef>
+              <a:spcAft>
+                <a:spcPts val="0"/>
+              </a:spcAft>
+            </a:pPr>
+            <a:r>
+              <a:rPr sz="1350" b="1">
+                <a:solidFill>
+                  <a:srgbClr val="35E5C5"/>
+                </a:solidFill>
+                <a:latin typeface="Heiti TC"/>
+              </a:rPr>
+              <a:t>+5%</a:t>
+            </a:r>
+          </a:p>
+        </p:txBody>
+      </p:sp>
+      <p:sp>
+        <p:nvSpPr>
+          <p:cNvPr id="12" name="Rectangle 11"/>
+          <p:cNvSpPr/>
+          <p:nvPr/>
+        </p:nvSpPr>
+        <p:spPr>
+          <a:xfrm>
+            <a:off x="7810499" y="1885950"/>
+            <a:ext cx="3810000" cy="482600"/>
+          </a:xfrm>
+          <a:prstGeom prst="rect">
+            <a:avLst/>
+          </a:prstGeom>
+          <a:solidFill>
+            <a:srgbClr val="111A2B"/>
+          </a:solidFill>
+          <a:ln>
+            <a:noFill/>
+          </a:ln>
+        </p:spPr>
+        <p:style>
+          <a:lnRef idx="1">
+            <a:schemeClr val="accent1"/>
+          </a:lnRef>
+          <a:fillRef idx="3">
+            <a:schemeClr val="accent1"/>
+          </a:fillRef>
+          <a:effectRef idx="2">
+            <a:schemeClr val="accent1"/>
+          </a:effectRef>
+          <a:fontRef idx="minor">
+            <a:schemeClr val="lt1"/>
+          </a:fontRef>
+        </p:style>
+        <p:txBody>
+          <a:bodyPr rtlCol="0" anchor="ctr"/>
+          <a:lstStyle/>
+          <a:p>
+            <a:pPr algn="ctr"/>
+          </a:p>
+        </p:txBody>
+      </p:sp>
+      <p:sp>
+        <p:nvSpPr>
+          <p:cNvPr id="13" name="TextBox 12"/>
+          <p:cNvSpPr txBox="1"/>
+          <p:nvPr/>
+        </p:nvSpPr>
+        <p:spPr>
+          <a:xfrm>
+            <a:off x="8001000" y="2025650"/>
+            <a:ext cx="2095499" cy="260350"/>
+          </a:xfrm>
+          <a:prstGeom prst="rect">
+            <a:avLst/>
+          </a:prstGeom>
+          <a:noFill/>
+        </p:spPr>
+        <p:txBody>
+          <a:bodyPr wrap="none" lIns="0" rIns="0" tIns="0" bIns="0">
+            <a:spAutoFit/>
+          </a:bodyPr>
+          <a:lstStyle/>
+          <a:p>
+            <a:pPr>
+              <a:lnSpc>
+                <a:spcPts val="1650"/>
+              </a:lnSpc>
+              <a:spcBef>
+                <a:spcPts val="0"/>
+              </a:spcBef>
+              <a:spcAft>
+                <a:spcPts val="0"/>
+              </a:spcAft>
+            </a:pPr>
+            <a:r>
+              <a:rPr sz="1350" b="1">
+                <a:solidFill>
+                  <a:srgbClr val="F3F7FF"/>
+                </a:solidFill>
+                <a:latin typeface="Heiti TC"/>
+              </a:rPr>
+              <a:t>LV.2</a:t>
+            </a:r>
+          </a:p>
+        </p:txBody>
+      </p:sp>
+      <p:sp>
+        <p:nvSpPr>
+          <p:cNvPr id="14" name="TextBox 13"/>
+          <p:cNvSpPr txBox="1"/>
+          <p:nvPr/>
+        </p:nvSpPr>
+        <p:spPr>
+          <a:xfrm>
+            <a:off x="10795000" y="2025650"/>
+            <a:ext cx="698500" cy="260350"/>
+          </a:xfrm>
+          <a:prstGeom prst="rect">
+            <a:avLst/>
+          </a:prstGeom>
+          <a:noFill/>
+        </p:spPr>
+        <p:txBody>
+          <a:bodyPr wrap="none" lIns="0" rIns="0" tIns="0" bIns="0">
+            <a:spAutoFit/>
+          </a:bodyPr>
+          <a:lstStyle/>
+          <a:p>
+            <a:pPr>
+              <a:lnSpc>
+                <a:spcPts val="1650"/>
+              </a:lnSpc>
+              <a:spcBef>
+                <a:spcPts val="0"/>
+              </a:spcBef>
+              <a:spcAft>
+                <a:spcPts val="0"/>
+              </a:spcAft>
+            </a:pPr>
+            <a:r>
+              <a:rPr sz="1350" b="1">
+                <a:solidFill>
+                  <a:srgbClr val="35E5C5"/>
+                </a:solidFill>
+                <a:latin typeface="Heiti TC"/>
+              </a:rPr>
+              <a:t>+10%</a:t>
+            </a:r>
+          </a:p>
+        </p:txBody>
+      </p:sp>
+      <p:sp>
+        <p:nvSpPr>
+          <p:cNvPr id="15" name="Rectangle 14"/>
+          <p:cNvSpPr/>
+          <p:nvPr/>
+        </p:nvSpPr>
+        <p:spPr>
+          <a:xfrm>
+            <a:off x="7810499" y="2470150"/>
+            <a:ext cx="3810000" cy="482600"/>
+          </a:xfrm>
+          <a:prstGeom prst="rect">
+            <a:avLst/>
+          </a:prstGeom>
+          <a:solidFill>
+            <a:srgbClr val="111A2B"/>
+          </a:solidFill>
+          <a:ln>
+            <a:noFill/>
+          </a:ln>
+        </p:spPr>
+        <p:style>
+          <a:lnRef idx="1">
+            <a:schemeClr val="accent1"/>
+          </a:lnRef>
+          <a:fillRef idx="3">
+            <a:schemeClr val="accent1"/>
+          </a:fillRef>
+          <a:effectRef idx="2">
+            <a:schemeClr val="accent1"/>
+          </a:effectRef>
+          <a:fontRef idx="minor">
+            <a:schemeClr val="lt1"/>
+          </a:fontRef>
+        </p:style>
+        <p:txBody>
+          <a:bodyPr rtlCol="0" anchor="ctr"/>
+          <a:lstStyle/>
+          <a:p>
+            <a:pPr algn="ctr"/>
+          </a:p>
+        </p:txBody>
+      </p:sp>
+      <p:sp>
+        <p:nvSpPr>
+          <p:cNvPr id="16" name="TextBox 15"/>
+          <p:cNvSpPr txBox="1"/>
+          <p:nvPr/>
+        </p:nvSpPr>
+        <p:spPr>
+          <a:xfrm>
+            <a:off x="8001000" y="2609850"/>
+            <a:ext cx="2095499" cy="260350"/>
+          </a:xfrm>
+          <a:prstGeom prst="rect">
+            <a:avLst/>
+          </a:prstGeom>
+          <a:noFill/>
+        </p:spPr>
+        <p:txBody>
+          <a:bodyPr wrap="none" lIns="0" rIns="0" tIns="0" bIns="0">
+            <a:spAutoFit/>
+          </a:bodyPr>
+          <a:lstStyle/>
+          <a:p>
+            <a:pPr>
+              <a:lnSpc>
+                <a:spcPts val="1650"/>
+              </a:lnSpc>
+              <a:spcBef>
+                <a:spcPts val="0"/>
+              </a:spcBef>
+              <a:spcAft>
+                <a:spcPts val="0"/>
+              </a:spcAft>
+            </a:pPr>
+            <a:r>
+              <a:rPr sz="1350" b="1">
+                <a:solidFill>
+                  <a:srgbClr val="F3F7FF"/>
+                </a:solidFill>
+                <a:latin typeface="Heiti TC"/>
+              </a:rPr>
+              <a:t>LV.3</a:t>
+            </a:r>
+          </a:p>
+        </p:txBody>
+      </p:sp>
+      <p:sp>
+        <p:nvSpPr>
+          <p:cNvPr id="17" name="TextBox 16"/>
+          <p:cNvSpPr txBox="1"/>
+          <p:nvPr/>
+        </p:nvSpPr>
+        <p:spPr>
+          <a:xfrm>
+            <a:off x="10795000" y="2609850"/>
+            <a:ext cx="698500" cy="260350"/>
+          </a:xfrm>
+          <a:prstGeom prst="rect">
+            <a:avLst/>
+          </a:prstGeom>
+          <a:noFill/>
+        </p:spPr>
+        <p:txBody>
+          <a:bodyPr wrap="none" lIns="0" rIns="0" tIns="0" bIns="0">
+            <a:spAutoFit/>
+          </a:bodyPr>
+          <a:lstStyle/>
+          <a:p>
+            <a:pPr>
+              <a:lnSpc>
+                <a:spcPts val="1650"/>
+              </a:lnSpc>
+              <a:spcBef>
+                <a:spcPts val="0"/>
+              </a:spcBef>
+              <a:spcAft>
+                <a:spcPts val="0"/>
+              </a:spcAft>
+            </a:pPr>
+            <a:r>
+              <a:rPr sz="1350" b="1">
+                <a:solidFill>
+                  <a:srgbClr val="35E5C5"/>
+                </a:solidFill>
+                <a:latin typeface="Heiti TC"/>
+              </a:rPr>
+              <a:t>+15%</a:t>
+            </a:r>
+          </a:p>
+        </p:txBody>
+      </p:sp>
+      <p:sp>
+        <p:nvSpPr>
+          <p:cNvPr id="18" name="Rectangle 17"/>
+          <p:cNvSpPr/>
+          <p:nvPr/>
+        </p:nvSpPr>
+        <p:spPr>
+          <a:xfrm>
+            <a:off x="7810499" y="3054350"/>
+            <a:ext cx="3810000" cy="482600"/>
+          </a:xfrm>
+          <a:prstGeom prst="rect">
+            <a:avLst/>
+          </a:prstGeom>
+          <a:solidFill>
+            <a:srgbClr val="111A2B"/>
+          </a:solidFill>
+          <a:ln>
+            <a:noFill/>
+          </a:ln>
+        </p:spPr>
+        <p:style>
+          <a:lnRef idx="1">
+            <a:schemeClr val="accent1"/>
+          </a:lnRef>
+          <a:fillRef idx="3">
+            <a:schemeClr val="accent1"/>
+          </a:fillRef>
+          <a:effectRef idx="2">
+            <a:schemeClr val="accent1"/>
+          </a:effectRef>
+          <a:fontRef idx="minor">
+            <a:schemeClr val="lt1"/>
+          </a:fontRef>
+        </p:style>
+        <p:txBody>
+          <a:bodyPr rtlCol="0" anchor="ctr"/>
+          <a:lstStyle/>
+          <a:p>
+            <a:pPr algn="ctr"/>
+          </a:p>
+        </p:txBody>
+      </p:sp>
+      <p:sp>
+        <p:nvSpPr>
+          <p:cNvPr id="19" name="TextBox 18"/>
+          <p:cNvSpPr txBox="1"/>
+          <p:nvPr/>
+        </p:nvSpPr>
+        <p:spPr>
+          <a:xfrm>
+            <a:off x="8001000" y="3194050"/>
+            <a:ext cx="2095499" cy="260350"/>
+          </a:xfrm>
+          <a:prstGeom prst="rect">
+            <a:avLst/>
+          </a:prstGeom>
+          <a:noFill/>
+        </p:spPr>
+        <p:txBody>
+          <a:bodyPr wrap="none" lIns="0" rIns="0" tIns="0" bIns="0">
+            <a:spAutoFit/>
+          </a:bodyPr>
+          <a:lstStyle/>
+          <a:p>
+            <a:pPr>
+              <a:lnSpc>
+                <a:spcPts val="1650"/>
+              </a:lnSpc>
+              <a:spcBef>
+                <a:spcPts val="0"/>
+              </a:spcBef>
+              <a:spcAft>
+                <a:spcPts val="0"/>
+              </a:spcAft>
+            </a:pPr>
+            <a:r>
+              <a:rPr sz="1350" b="1">
+                <a:solidFill>
+                  <a:srgbClr val="F3F7FF"/>
+                </a:solidFill>
+                <a:latin typeface="Heiti TC"/>
+              </a:rPr>
+              <a:t>LV.4</a:t>
+            </a:r>
+          </a:p>
+        </p:txBody>
+      </p:sp>
+      <p:sp>
+        <p:nvSpPr>
+          <p:cNvPr id="20" name="TextBox 19"/>
+          <p:cNvSpPr txBox="1"/>
+          <p:nvPr/>
+        </p:nvSpPr>
+        <p:spPr>
+          <a:xfrm>
+            <a:off x="10795000" y="3194050"/>
+            <a:ext cx="698500" cy="260350"/>
+          </a:xfrm>
+          <a:prstGeom prst="rect">
+            <a:avLst/>
+          </a:prstGeom>
+          <a:noFill/>
+        </p:spPr>
+        <p:txBody>
+          <a:bodyPr wrap="none" lIns="0" rIns="0" tIns="0" bIns="0">
+            <a:spAutoFit/>
+          </a:bodyPr>
+          <a:lstStyle/>
+          <a:p>
+            <a:pPr>
+              <a:lnSpc>
+                <a:spcPts val="1650"/>
+              </a:lnSpc>
+              <a:spcBef>
+                <a:spcPts val="0"/>
+              </a:spcBef>
+              <a:spcAft>
+                <a:spcPts val="0"/>
+              </a:spcAft>
+            </a:pPr>
+            <a:r>
+              <a:rPr sz="1350" b="1">
+                <a:solidFill>
+                  <a:srgbClr val="35E5C5"/>
+                </a:solidFill>
+                <a:latin typeface="Heiti TC"/>
+              </a:rPr>
+              <a:t>+20%</a:t>
+            </a:r>
+          </a:p>
+        </p:txBody>
+      </p:sp>
+      <p:sp>
+        <p:nvSpPr>
+          <p:cNvPr id="21" name="Rectangle 20"/>
+          <p:cNvSpPr/>
+          <p:nvPr/>
+        </p:nvSpPr>
+        <p:spPr>
+          <a:xfrm>
+            <a:off x="7810499" y="3638550"/>
+            <a:ext cx="3810000" cy="482600"/>
+          </a:xfrm>
+          <a:prstGeom prst="rect">
+            <a:avLst/>
+          </a:prstGeom>
+          <a:solidFill>
+            <a:srgbClr val="111A2B"/>
+          </a:solidFill>
+          <a:ln>
+            <a:noFill/>
+          </a:ln>
+        </p:spPr>
+        <p:style>
+          <a:lnRef idx="1">
+            <a:schemeClr val="accent1"/>
+          </a:lnRef>
+          <a:fillRef idx="3">
+            <a:schemeClr val="accent1"/>
+          </a:fillRef>
+          <a:effectRef idx="2">
+            <a:schemeClr val="accent1"/>
+          </a:effectRef>
+          <a:fontRef idx="minor">
+            <a:schemeClr val="lt1"/>
+          </a:fontRef>
+        </p:style>
+        <p:txBody>
+          <a:bodyPr rtlCol="0" anchor="ctr"/>
+          <a:lstStyle/>
+          <a:p>
+            <a:pPr algn="ctr"/>
+          </a:p>
+        </p:txBody>
+      </p:sp>
+      <p:sp>
+        <p:nvSpPr>
+          <p:cNvPr id="22" name="TextBox 21"/>
+          <p:cNvSpPr txBox="1"/>
+          <p:nvPr/>
+        </p:nvSpPr>
+        <p:spPr>
+          <a:xfrm>
+            <a:off x="8001000" y="3778250"/>
+            <a:ext cx="2095499" cy="260350"/>
+          </a:xfrm>
+          <a:prstGeom prst="rect">
+            <a:avLst/>
+          </a:prstGeom>
+          <a:noFill/>
+        </p:spPr>
+        <p:txBody>
+          <a:bodyPr wrap="none" lIns="0" rIns="0" tIns="0" bIns="0">
+            <a:spAutoFit/>
+          </a:bodyPr>
+          <a:lstStyle/>
+          <a:p>
+            <a:pPr>
+              <a:lnSpc>
+                <a:spcPts val="1650"/>
+              </a:lnSpc>
+              <a:spcBef>
+                <a:spcPts val="0"/>
+              </a:spcBef>
+              <a:spcAft>
+                <a:spcPts val="0"/>
+              </a:spcAft>
+            </a:pPr>
+            <a:r>
+              <a:rPr sz="1350" b="1">
+                <a:solidFill>
+                  <a:srgbClr val="F3F7FF"/>
+                </a:solidFill>
+                <a:latin typeface="Heiti TC"/>
+              </a:rPr>
+              <a:t>LV.5</a:t>
+            </a:r>
+          </a:p>
+        </p:txBody>
+      </p:sp>
+      <p:sp>
+        <p:nvSpPr>
+          <p:cNvPr id="23" name="TextBox 22"/>
+          <p:cNvSpPr txBox="1"/>
+          <p:nvPr/>
+        </p:nvSpPr>
+        <p:spPr>
+          <a:xfrm>
+            <a:off x="10795000" y="3778250"/>
+            <a:ext cx="698500" cy="260350"/>
+          </a:xfrm>
+          <a:prstGeom prst="rect">
+            <a:avLst/>
+          </a:prstGeom>
+          <a:noFill/>
+        </p:spPr>
+        <p:txBody>
+          <a:bodyPr wrap="none" lIns="0" rIns="0" tIns="0" bIns="0">
+            <a:spAutoFit/>
+          </a:bodyPr>
+          <a:lstStyle/>
+          <a:p>
+            <a:pPr>
+              <a:lnSpc>
+                <a:spcPts val="1650"/>
+              </a:lnSpc>
+              <a:spcBef>
+                <a:spcPts val="0"/>
+              </a:spcBef>
+              <a:spcAft>
+                <a:spcPts val="0"/>
+              </a:spcAft>
+            </a:pPr>
+            <a:r>
+              <a:rPr sz="1350" b="1">
+                <a:solidFill>
+                  <a:srgbClr val="35E5C5"/>
+                </a:solidFill>
+                <a:latin typeface="Heiti TC"/>
+              </a:rPr>
+              <a:t>+25%</a:t>
+            </a:r>
+          </a:p>
+        </p:txBody>
+      </p:sp>
+      <p:sp>
+        <p:nvSpPr>
+          <p:cNvPr id="24" name="Rectangle 23"/>
+          <p:cNvSpPr/>
+          <p:nvPr/>
+        </p:nvSpPr>
+        <p:spPr>
+          <a:xfrm>
+            <a:off x="7810499" y="4311650"/>
+            <a:ext cx="3810000" cy="571500"/>
+          </a:xfrm>
+          <a:prstGeom prst="rect">
+            <a:avLst/>
+          </a:prstGeom>
+          <a:solidFill>
+            <a:srgbClr val="1B2A3F"/>
+          </a:solidFill>
+          <a:ln>
+            <a:noFill/>
+          </a:ln>
+        </p:spPr>
+        <p:style>
+          <a:lnRef idx="1">
+            <a:schemeClr val="accent1"/>
+          </a:lnRef>
+          <a:fillRef idx="3">
+            <a:schemeClr val="accent1"/>
+          </a:fillRef>
+          <a:effectRef idx="2">
+            <a:schemeClr val="accent1"/>
+          </a:effectRef>
+          <a:fontRef idx="minor">
+            <a:schemeClr val="lt1"/>
+          </a:fontRef>
+        </p:style>
+        <p:txBody>
+          <a:bodyPr rtlCol="0" anchor="ctr"/>
+          <a:lstStyle/>
+          <a:p>
+            <a:pPr algn="ctr"/>
+          </a:p>
+        </p:txBody>
+      </p:sp>
+      <p:sp>
+        <p:nvSpPr>
+          <p:cNvPr id="25" name="TextBox 24"/>
+          <p:cNvSpPr txBox="1"/>
+          <p:nvPr/>
+        </p:nvSpPr>
+        <p:spPr>
+          <a:xfrm>
+            <a:off x="8001000" y="4400550"/>
+            <a:ext cx="2667000" cy="241300"/>
+          </a:xfrm>
+          <a:prstGeom prst="rect">
+            <a:avLst/>
+          </a:prstGeom>
+          <a:noFill/>
+        </p:spPr>
+        <p:txBody>
+          <a:bodyPr wrap="none" lIns="0" rIns="0" tIns="0" bIns="0">
+            <a:spAutoFit/>
+          </a:bodyPr>
+          <a:lstStyle/>
+          <a:p>
+            <a:pPr>
+              <a:lnSpc>
+                <a:spcPts val="1500"/>
+              </a:lnSpc>
+              <a:spcBef>
+                <a:spcPts val="0"/>
+              </a:spcBef>
+              <a:spcAft>
+                <a:spcPts val="0"/>
+              </a:spcAft>
+            </a:pPr>
+            <a:r>
+              <a:rPr sz="1200" b="1">
+                <a:solidFill>
+                  <a:srgbClr val="FFD080"/>
+                </a:solidFill>
+                <a:latin typeface="Heiti TC"/>
+              </a:rPr>
+              <a:t>保育提撥</a:t>
+            </a:r>
+          </a:p>
+        </p:txBody>
+      </p:sp>
+      <p:sp>
+        <p:nvSpPr>
+          <p:cNvPr id="26" name="TextBox 25"/>
+          <p:cNvSpPr txBox="1"/>
+          <p:nvPr/>
+        </p:nvSpPr>
+        <p:spPr>
+          <a:xfrm>
+            <a:off x="8001000" y="4629150"/>
+            <a:ext cx="3302000" cy="241300"/>
+          </a:xfrm>
+          <a:prstGeom prst="rect">
+            <a:avLst/>
+          </a:prstGeom>
+          <a:noFill/>
+        </p:spPr>
+        <p:txBody>
+          <a:bodyPr wrap="none" lIns="0" rIns="0" tIns="0" bIns="0">
+            <a:spAutoFit/>
+          </a:bodyPr>
+          <a:lstStyle/>
+          <a:p>
+            <a:pPr>
+              <a:lnSpc>
+                <a:spcPts val="1500"/>
+              </a:lnSpc>
+              <a:spcBef>
+                <a:spcPts val="0"/>
+              </a:spcBef>
+              <a:spcAft>
+                <a:spcPts val="0"/>
+              </a:spcAft>
+            </a:pPr>
+            <a:r>
+              <a:rPr sz="1200" b="0">
+                <a:solidFill>
+                  <a:srgbClr val="F3F7FF"/>
+                </a:solidFill>
+                <a:latin typeface="Heiti TC"/>
+              </a:rPr>
+              <a:t>質押獎勵的 10%</a:t>
+            </a:r>
+          </a:p>
+        </p:txBody>
+      </p:sp>
+      <p:sp>
+        <p:nvSpPr>
+          <p:cNvPr id="27" name="TextBox 26"/>
+          <p:cNvSpPr txBox="1"/>
+          <p:nvPr/>
+        </p:nvSpPr>
+        <p:spPr>
+          <a:xfrm>
+            <a:off x="539750" y="5353050"/>
+            <a:ext cx="11112500" cy="247649"/>
+          </a:xfrm>
+          <a:prstGeom prst="rect">
+            <a:avLst/>
+          </a:prstGeom>
+          <a:noFill/>
+        </p:spPr>
+        <p:txBody>
+          <a:bodyPr wrap="none" lIns="0" rIns="0" tIns="0" bIns="0">
+            <a:spAutoFit/>
+          </a:bodyPr>
+          <a:lstStyle/>
+          <a:p>
+            <a:pPr>
+              <a:lnSpc>
+                <a:spcPts val="1550"/>
+              </a:lnSpc>
+              <a:spcBef>
+                <a:spcPts val="0"/>
+              </a:spcBef>
+              <a:spcAft>
+                <a:spcPts val="0"/>
+              </a:spcAft>
+            </a:pPr>
+            <a:r>
+              <a:rPr sz="1250" b="1">
+                <a:solidFill>
+                  <a:srgbClr val="FFD080"/>
+                </a:solidFill>
+                <a:latin typeface="Heiti TC"/>
+              </a:rPr>
+              <a:t>規劃中 · 尚未實作</a:t>
+            </a:r>
+          </a:p>
+        </p:txBody>
+      </p:sp>
+    </p:spTree>
+  </p:cSld>
+  <p:clrMapOvr>
+    <a:masterClrMapping/>
+  </p:clrMapOvr>
+</p:sld>
+</file>
+
+<file path=ppt/slides/slide11.xml><?xml version="1.0" encoding="utf-8"?>
+<p:sld xmlns:a="http://schemas.openxmlformats.org/drawingml/2006/main" xmlns:p="http://schemas.openxmlformats.org/presentationml/2006/main" xmlns:r="http://schemas.openxmlformats.org/officeDocument/2006/relationships">
+  <p:cSld>
+    <p:bg>
+      <p:bgPr>
+        <a:solidFill>
+          <a:srgbClr val="070B16"/>
+        </a:solidFill>
+        <a:effectLst/>
+      </p:bgPr>
+    </p:bg>
+    <p:spTree>
+      <p:nvGrpSpPr>
+        <p:cNvPr id="1" name=""/>
+        <p:cNvGrpSpPr/>
+        <p:nvPr/>
+      </p:nvGrpSpPr>
+      <p:grpSpPr/>
+      <p:sp>
+        <p:nvSpPr>
+          <p:cNvPr id="2" name="Rectangle 1"/>
+          <p:cNvSpPr/>
+          <p:nvPr/>
+        </p:nvSpPr>
+        <p:spPr>
+          <a:xfrm>
+            <a:off x="508000" y="412750"/>
+            <a:ext cx="50800" cy="158750"/>
+          </a:xfrm>
+          <a:prstGeom prst="rect">
+            <a:avLst/>
+          </a:prstGeom>
+          <a:solidFill>
+            <a:srgbClr val="35E5C5"/>
+          </a:solidFill>
+          <a:ln>
+            <a:noFill/>
+          </a:ln>
+        </p:spPr>
+        <p:style>
+          <a:lnRef idx="1">
+            <a:schemeClr val="accent1"/>
+          </a:lnRef>
+          <a:fillRef idx="3">
+            <a:schemeClr val="accent1"/>
+          </a:fillRef>
+          <a:effectRef idx="2">
+            <a:schemeClr val="accent1"/>
+          </a:effectRef>
+          <a:fontRef idx="minor">
+            <a:schemeClr val="lt1"/>
+          </a:fontRef>
+        </p:style>
+        <p:txBody>
+          <a:bodyPr rtlCol="0" anchor="ctr"/>
+          <a:lstStyle/>
+          <a:p>
+            <a:pPr algn="ctr"/>
+          </a:p>
+        </p:txBody>
+      </p:sp>
+      <p:sp>
+        <p:nvSpPr>
+          <p:cNvPr id="3" name="TextBox 2"/>
+          <p:cNvSpPr txBox="1"/>
+          <p:nvPr/>
+        </p:nvSpPr>
+        <p:spPr>
+          <a:xfrm>
+            <a:off x="698500" y="412750"/>
+            <a:ext cx="6985000" cy="254000"/>
+          </a:xfrm>
+          <a:prstGeom prst="rect">
+            <a:avLst/>
+          </a:prstGeom>
+          <a:noFill/>
+        </p:spPr>
+        <p:txBody>
+          <a:bodyPr wrap="none" lIns="0" rIns="0" tIns="0" bIns="0">
+            <a:spAutoFit/>
+          </a:bodyPr>
+          <a:lstStyle/>
+          <a:p>
+            <a:pPr>
+              <a:lnSpc>
+                <a:spcPts val="1600"/>
+              </a:lnSpc>
+              <a:spcBef>
+                <a:spcPts val="0"/>
+              </a:spcBef>
+              <a:spcAft>
+                <a:spcPts val="0"/>
+              </a:spcAft>
+            </a:pPr>
+            <a:r>
+              <a:rPr sz="1300" b="1">
+                <a:solidFill>
+                  <a:srgbClr val="35E5C5"/>
+                </a:solidFill>
+                <a:latin typeface="Heiti TC"/>
+              </a:rPr>
+              <a:t>NEONSHIFT  /  E  ·  中文對稿</a:t>
+            </a:r>
+          </a:p>
+        </p:txBody>
+      </p:sp>
+      <p:sp>
+        <p:nvSpPr>
+          <p:cNvPr id="4" name="TextBox 3"/>
+          <p:cNvSpPr txBox="1"/>
+          <p:nvPr/>
+        </p:nvSpPr>
+        <p:spPr>
+          <a:xfrm>
+            <a:off x="10795000" y="412750"/>
+            <a:ext cx="952500" cy="254000"/>
+          </a:xfrm>
+          <a:prstGeom prst="rect">
+            <a:avLst/>
+          </a:prstGeom>
+          <a:noFill/>
+        </p:spPr>
+        <p:txBody>
+          <a:bodyPr wrap="none" lIns="0" rIns="0" tIns="0" bIns="0">
+            <a:spAutoFit/>
+          </a:bodyPr>
+          <a:lstStyle/>
+          <a:p>
+            <a:pPr>
+              <a:lnSpc>
+                <a:spcPts val="1600"/>
+              </a:lnSpc>
+              <a:spcBef>
+                <a:spcPts val="0"/>
+              </a:spcBef>
+              <a:spcAft>
+                <a:spcPts val="0"/>
+              </a:spcAft>
+            </a:pPr>
+            <a:r>
+              <a:rPr sz="1300" b="0">
+                <a:solidFill>
+                  <a:srgbClr val="A8B6CF"/>
+                </a:solidFill>
+                <a:latin typeface="Heiti TC"/>
+              </a:rPr>
+              <a:t>11 / 11</a:t>
             </a:r>
           </a:p>
         </p:txBody>
@@ -5117,7 +6436,7 @@
                 </a:solidFill>
                 <a:latin typeface="Heiti TC"/>
               </a:rPr>
-              <a:t>02 / 10</a:t>
+              <a:t>02 / 11</a:t>
             </a:r>
           </a:p>
         </p:txBody>
@@ -5899,7 +7218,7 @@
                 </a:solidFill>
                 <a:latin typeface="Heiti TC"/>
               </a:rPr>
-              <a:t>03 / 10</a:t>
+              <a:t>03 / 11</a:t>
             </a:r>
           </a:p>
         </p:txBody>
@@ -6372,7 +7691,7 @@
                 </a:solidFill>
                 <a:latin typeface="Heiti TC"/>
               </a:rPr>
-              <a:t>04 / 10</a:t>
+              <a:t>04 / 11</a:t>
             </a:r>
           </a:p>
         </p:txBody>
@@ -6867,7 +8186,7 @@
                 </a:solidFill>
                 <a:latin typeface="Heiti TC"/>
               </a:rPr>
-              <a:t>05 / 10</a:t>
+              <a:t>05 / 11</a:t>
             </a:r>
           </a:p>
         </p:txBody>
@@ -7649,7 +8968,7 @@
                 </a:solidFill>
                 <a:latin typeface="Heiti TC"/>
               </a:rPr>
-              <a:t>06 / 10</a:t>
+              <a:t>06 / 11</a:t>
             </a:r>
           </a:p>
         </p:txBody>
@@ -8144,7 +9463,7 @@
                 </a:solidFill>
                 <a:latin typeface="Heiti TC"/>
               </a:rPr>
-              <a:t>07 / 10</a:t>
+              <a:t>07 / 11</a:t>
             </a:r>
           </a:p>
         </p:txBody>
@@ -8639,7 +9958,7 @@
                 </a:solidFill>
                 <a:latin typeface="Heiti TC"/>
               </a:rPr>
-              <a:t>08 / 10</a:t>
+              <a:t>08 / 11</a:t>
             </a:r>
           </a:p>
         </p:txBody>
@@ -9134,7 +10453,7 @@
                 </a:solidFill>
                 <a:latin typeface="Heiti TC"/>
               </a:rPr>
-              <a:t>09 / 10</a:t>
+              <a:t>09 / 11</a:t>
             </a:r>
           </a:p>
         </p:txBody>

--- a/output/hackathon-flexclip-en/flexclip-v4/NeonShift_FlexClip_v4_ZH-TW_Review.pptx
+++ b/output/hackathon-flexclip-en/flexclip-v4/NeonShift_FlexClip_v4_ZH-TW_Review.pptx
@@ -5206,7 +5206,7 @@
                 </a:solidFill>
                 <a:latin typeface="Heiti TC"/>
               </a:rPr>
-              <a:t>+5%</a:t>
+              <a:t>0%</a:t>
             </a:r>
           </a:p>
         </p:txBody>
@@ -5339,7 +5339,7 @@
                 </a:solidFill>
                 <a:latin typeface="Heiti TC"/>
               </a:rPr>
-              <a:t>+10%</a:t>
+              <a:t>+3%</a:t>
             </a:r>
           </a:p>
         </p:txBody>
@@ -5472,7 +5472,7 @@
                 </a:solidFill>
                 <a:latin typeface="Heiti TC"/>
               </a:rPr>
-              <a:t>+15%</a:t>
+              <a:t>+5%</a:t>
             </a:r>
           </a:p>
         </p:txBody>
@@ -5605,7 +5605,7 @@
                 </a:solidFill>
                 <a:latin typeface="Heiti TC"/>
               </a:rPr>
-              <a:t>+20%</a:t>
+              <a:t>+7%</a:t>
             </a:r>
           </a:p>
         </p:txBody>
@@ -5738,7 +5738,7 @@
                 </a:solidFill>
                 <a:latin typeface="Heiti TC"/>
               </a:rPr>
-              <a:t>+25%</a:t>
+              <a:t>+10%</a:t>
             </a:r>
           </a:p>
         </p:txBody>

--- a/output/hackathon-flexclip-en/flexclip-v4/NeonShift_FlexClip_v4_ZH-TW_Review.pptx
+++ b/output/hackathon-flexclip-en/flexclip-v4/NeonShift_FlexClip_v4_ZH-TW_Review.pptx
@@ -5206,7 +5206,7 @@
                 </a:solidFill>
                 <a:latin typeface="Heiti TC"/>
               </a:rPr>
-              <a:t>0%</a:t>
+              <a:t>+1%</a:t>
             </a:r>
           </a:p>
         </p:txBody>

--- a/output/hackathon-flexclip-en/flexclip-v4/NeonShift_FlexClip_v4_ZH-TW_Review.pptx
+++ b/output/hackathon-flexclip-en/flexclip-v4/NeonShift_FlexClip_v4_ZH-TW_Review.pptx
@@ -582,7 +582,7 @@
           <a:lstStyle/>
           <a:p>
             <a:r>
-              <a:t>下一步：質押 SKR 可提升任務獎勵，跑鞋等級越高，加成越高。質押獎勵的固定比例，將撥入獨立追蹤的野生動物保育基金。比率尚未定案。</a:t>
+              <a:t>下一步：質押 SKR 可提升每日任務獎勵，跑鞋等級越高，加成越高。加成的固定比例，將撥入獨立追蹤的野生動物保育基金。比率尚未定案。</a:t>
             </a:r>
           </a:p>
         </p:txBody>
@@ -4939,7 +4939,7 @@
                 </a:solidFill>
                 <a:latin typeface="Heiti TC"/>
               </a:rPr>
-              <a:t>跑鞋等級越高，質押加成越高。</a:t>
+              <a:t>質押 SKR 提升每日任務獎勵。</a:t>
             </a:r>
           </a:p>
           <a:p>
@@ -4961,7 +4961,7 @@
                 </a:solidFill>
                 <a:latin typeface="Heiti TC"/>
               </a:rPr>
-              <a:t>質押獎勵的固定比例</a:t>
+              <a:t>跑鞋等級越高，加成越高。</a:t>
             </a:r>
           </a:p>
           <a:p>
@@ -4983,7 +4983,7 @@
                 </a:solidFill>
                 <a:latin typeface="Heiti TC"/>
               </a:rPr>
-              <a:t>撥入野生動物保育。</a:t>
+              <a:t>加成的 10% 撥入野生動物保育。</a:t>
             </a:r>
           </a:p>
         </p:txBody>
@@ -5871,7 +5871,7 @@
                 </a:solidFill>
                 <a:latin typeface="Heiti TC"/>
               </a:rPr>
-              <a:t>質押獎勵的 10%</a:t>
+              <a:t>加成獎勵的 10%</a:t>
             </a:r>
           </a:p>
         </p:txBody>
@@ -5916,7 +5916,7 @@
                 </a:solidFill>
                 <a:latin typeface="Heiti TC"/>
               </a:rPr>
-              <a:t>規劃中 · 尚未實作</a:t>
+              <a:t>規劃中 · 尚未實作 · 不承諾收益</a:t>
             </a:r>
           </a:p>
         </p:txBody>
@@ -6156,7 +6156,7 @@
         <p:spPr>
           <a:xfrm>
             <a:off x="539750" y="2984500"/>
-            <a:ext cx="11176000" cy="330200"/>
+            <a:ext cx="11176000" cy="609600"/>
           </a:xfrm>
           <a:prstGeom prst="rect">
             <a:avLst/>
@@ -6188,6 +6188,28 @@
                 <a:latin typeface="Heiti TC"/>
               </a:rPr>
               <a:t>探索 NeonShift。</a:t>
+            </a:r>
+          </a:p>
+          <a:p>
+            <a:pPr>
+              <a:lnSpc>
+                <a:spcPts val="2200"/>
+              </a:lnSpc>
+              <a:spcBef>
+                <a:spcPts val="0"/>
+              </a:spcBef>
+              <a:spcAft>
+                <a:spcPts val="0"/>
+              </a:spcAft>
+            </a:pPr>
+            <a:r>
+              <a:rPr sz="1800" b="0">
+                <a:solidFill>
+                  <a:srgbClr val="A8B6CF"/>
+                </a:solidFill>
+                <a:latin typeface="Heiti TC"/>
+              </a:rPr>
+              <a:t>github.com/stan0714/neonshift  ·  neonshift.cc</a:t>
             </a:r>
           </a:p>
         </p:txBody>
@@ -7870,7 +7892,7 @@
                 </a:solidFill>
                 <a:latin typeface="Heiti TC"/>
               </a:rPr>
-              <a:t>初始鞋款與等級升級維持免費</a:t>
+              <a:t>初始鞋款與等級升級：無須購買</a:t>
             </a:r>
           </a:p>
         </p:txBody>
@@ -10587,7 +10609,7 @@
                 </a:solidFill>
                 <a:latin typeface="Heiti TC"/>
               </a:rPr>
-              <a:t>下一步：在地社群試辦。</a:t>
+              <a:t>在地社群試辦仍在規劃。</a:t>
             </a:r>
           </a:p>
         </p:txBody>
@@ -10632,7 +10654,7 @@
                 </a:solidFill>
                 <a:latin typeface="Heiti TC"/>
               </a:rPr>
-              <a:t>下一步：在地試辦</a:t>
+              <a:t>現在：物種故事卡</a:t>
             </a:r>
           </a:p>
         </p:txBody>

--- a/output/hackathon-flexclip-en/flexclip-v4/NeonShift_FlexClip_v4_ZH-TW_Review.pptx
+++ b/output/hackathon-flexclip-en/flexclip-v4/NeonShift_FlexClip_v4_ZH-TW_Review.pptx
@@ -4561,7 +4561,7 @@
       </p:sp>
       <p:pic>
         <p:nvPicPr>
-          <p:cNvPr id="9" name="Picture 8" descr="2026-10-02_c14_s01_home-top.png"/>
+          <p:cNvPr id="9" name="Picture 8" descr="2026-10-06_c21_s01_home-top.png"/>
           <p:cNvPicPr>
             <a:picLocks noChangeAspect="1"/>
           </p:cNvPicPr>
@@ -4623,7 +4623,7 @@
                 </a:solidFill>
                 <a:latin typeface="Heiti TC"/>
               </a:rPr>
-              <a:t>實機截圖 · 10/2 · APK 版本代碼 14</a:t>
+              <a:t>實機截圖 · 10/6 · APK 版本代碼 21</a:t>
             </a:r>
           </a:p>
         </p:txBody>
@@ -7447,7 +7447,7 @@
       </p:sp>
       <p:pic>
         <p:nvPicPr>
-          <p:cNvPr id="9" name="Picture 8" descr="2026-10-02_c14_s04_summary-finished.png"/>
+          <p:cNvPr id="9" name="Picture 8" descr="2026-10-06_c21_s04_summary-6k.png"/>
           <p:cNvPicPr>
             <a:picLocks noChangeAspect="1"/>
           </p:cNvPicPr>
@@ -7509,7 +7509,7 @@
                 </a:solidFill>
                 <a:latin typeface="Heiti TC"/>
               </a:rPr>
-              <a:t>實機截圖 · 10/2 · APK 版本代碼 14</a:t>
+              <a:t>實機截圖 · 10/6 · APK 版本代碼 21</a:t>
             </a:r>
           </a:p>
         </p:txBody>
@@ -7942,7 +7942,7 @@
       </p:sp>
       <p:pic>
         <p:nvPicPr>
-          <p:cNvPr id="9" name="Picture 8" descr="2026-10-02_c14_s04_profile-sync.png"/>
+          <p:cNvPr id="9" name="Picture 8" descr="2026-10-06_c21_s04_profile-sync.png"/>
           <p:cNvPicPr>
             <a:picLocks noChangeAspect="1"/>
           </p:cNvPicPr>
@@ -8004,7 +8004,7 @@
                 </a:solidFill>
                 <a:latin typeface="Heiti TC"/>
               </a:rPr>
-              <a:t>實機截圖 · 10/2 · APK 版本代碼 14</a:t>
+              <a:t>實機截圖 · 10/6 · APK 版本代碼 21</a:t>
             </a:r>
           </a:p>
         </p:txBody>
@@ -8222,7 +8222,7 @@
         <p:spPr>
           <a:xfrm>
             <a:off x="508000" y="1206500"/>
-            <a:ext cx="11176000" cy="1143000"/>
+            <a:ext cx="5461000" cy="1143000"/>
           </a:xfrm>
           <a:prstGeom prst="rect">
             <a:avLst/>
@@ -8289,7 +8289,7 @@
         <p:spPr>
           <a:xfrm>
             <a:off x="539750" y="2984500"/>
-            <a:ext cx="11176000" cy="609600"/>
+            <a:ext cx="5461000" cy="609600"/>
           </a:xfrm>
           <a:prstGeom prst="rect">
             <a:avLst/>
@@ -8356,7 +8356,7 @@
         <p:spPr>
           <a:xfrm>
             <a:off x="539750" y="4127500"/>
-            <a:ext cx="11176000" cy="247649"/>
+            <a:ext cx="5461000" cy="247649"/>
           </a:xfrm>
           <a:prstGeom prst="rect">
             <a:avLst/>
@@ -8400,8 +8400,8 @@
         </p:nvSpPr>
         <p:spPr>
           <a:xfrm>
-            <a:off x="7810499" y="1492250"/>
-            <a:ext cx="3810000" cy="825500"/>
+            <a:off x="6096000" y="965200"/>
+            <a:ext cx="5588000" cy="4127500"/>
           </a:xfrm>
           <a:prstGeom prst="rect">
             <a:avLst/>
@@ -8435,16 +8435,88 @@
           </a:p>
         </p:txBody>
       </p:sp>
-      <p:sp>
-        <p:nvSpPr>
-          <p:cNvPr id="9" name="TextBox 8"/>
+      <p:pic>
+        <p:nvPicPr>
+          <p:cNvPr id="9" name="Picture 8" descr="2026-10-06_c21_s05_claim-1-wallet-approve.png"/>
+          <p:cNvPicPr>
+            <a:picLocks noChangeAspect="1"/>
+          </p:cNvPicPr>
+          <p:nvPr/>
+        </p:nvPicPr>
+        <p:blipFill>
+          <a:blip r:embed="rId2"/>
+          <a:stretch>
+            <a:fillRect/>
+          </a:stretch>
+        </p:blipFill>
+        <p:spPr>
+          <a:xfrm>
+            <a:off x="6191250" y="1104900"/>
+            <a:ext cx="1714500" cy="3816349"/>
+          </a:xfrm>
+          <a:prstGeom prst="rect">
+            <a:avLst/>
+          </a:prstGeom>
+        </p:spPr>
+      </p:pic>
+      <p:pic>
+        <p:nvPicPr>
+          <p:cNvPr id="10" name="Picture 9" descr="2026-10-06_c21_s05_claim-2-step-claimed.png"/>
+          <p:cNvPicPr>
+            <a:picLocks noChangeAspect="1"/>
+          </p:cNvPicPr>
+          <p:nvPr/>
+        </p:nvPicPr>
+        <p:blipFill>
+          <a:blip r:embed="rId3"/>
+          <a:stretch>
+            <a:fillRect/>
+          </a:stretch>
+        </p:blipFill>
+        <p:spPr>
+          <a:xfrm>
+            <a:off x="8001000" y="1104900"/>
+            <a:ext cx="1714500" cy="3816349"/>
+          </a:xfrm>
+          <a:prstGeom prst="rect">
+            <a:avLst/>
+          </a:prstGeom>
+        </p:spPr>
+      </p:pic>
+      <p:pic>
+        <p:nvPicPr>
+          <p:cNvPr id="11" name="Picture 10" descr="2026-10-06_c21_s05_claim-3-today-2of2.png"/>
+          <p:cNvPicPr>
+            <a:picLocks noChangeAspect="1"/>
+          </p:cNvPicPr>
+          <p:nvPr/>
+        </p:nvPicPr>
+        <p:blipFill>
+          <a:blip r:embed="rId4"/>
+          <a:stretch>
+            <a:fillRect/>
+          </a:stretch>
+        </p:blipFill>
+        <p:spPr>
+          <a:xfrm>
+            <a:off x="9810750" y="1104900"/>
+            <a:ext cx="1714500" cy="3816349"/>
+          </a:xfrm>
+          <a:prstGeom prst="rect">
+            <a:avLst/>
+          </a:prstGeom>
+        </p:spPr>
+      </p:pic>
+      <p:sp>
+        <p:nvSpPr>
+          <p:cNvPr id="12" name="TextBox 11"/>
           <p:cNvSpPr txBox="1"/>
           <p:nvPr/>
         </p:nvSpPr>
         <p:spPr>
           <a:xfrm>
-            <a:off x="8001000" y="1619250"/>
-            <a:ext cx="571500" cy="260350"/>
+            <a:off x="539750" y="4737100"/>
+            <a:ext cx="7112000" cy="247649"/>
           </a:xfrm>
           <a:prstGeom prst="rect">
             <a:avLst/>
@@ -8459,37 +8531,37 @@
           <a:p>
             <a:pPr>
               <a:lnSpc>
-                <a:spcPts val="1650"/>
-              </a:lnSpc>
-              <a:spcBef>
-                <a:spcPts val="0"/>
-              </a:spcBef>
-              <a:spcAft>
-                <a:spcPts val="0"/>
-              </a:spcAft>
-            </a:pPr>
-            <a:r>
-              <a:rPr sz="1350" b="1">
-                <a:solidFill>
-                  <a:srgbClr val="35E5C5"/>
-                </a:solidFill>
-                <a:latin typeface="Heiti TC"/>
-              </a:rPr>
-              <a:t>01</a:t>
-            </a:r>
-          </a:p>
-        </p:txBody>
-      </p:sp>
-      <p:sp>
-        <p:nvSpPr>
-          <p:cNvPr id="10" name="TextBox 9"/>
+                <a:spcPts val="1550"/>
+              </a:lnSpc>
+              <a:spcBef>
+                <a:spcPts val="0"/>
+              </a:spcBef>
+              <a:spcAft>
+                <a:spcPts val="0"/>
+              </a:spcAft>
+            </a:pPr>
+            <a:r>
+              <a:rPr sz="1250" b="0">
+                <a:solidFill>
+                  <a:srgbClr val="FFD080"/>
+                </a:solidFill>
+                <a:latin typeface="Heiti TC"/>
+              </a:rPr>
+              <a:t>實機截圖 · 10/6 · APK 版本代碼 21</a:t>
+            </a:r>
+          </a:p>
+        </p:txBody>
+      </p:sp>
+      <p:sp>
+        <p:nvSpPr>
+          <p:cNvPr id="13" name="TextBox 12"/>
           <p:cNvSpPr txBox="1"/>
           <p:nvPr/>
         </p:nvSpPr>
         <p:spPr>
           <a:xfrm>
-            <a:off x="8001000" y="1905000"/>
-            <a:ext cx="3397250" cy="247649"/>
+            <a:off x="539750" y="5353050"/>
+            <a:ext cx="11112500" cy="247649"/>
           </a:xfrm>
           <a:prstGeom prst="rect">
             <a:avLst/>
@@ -8516,322 +8588,11 @@
             <a:r>
               <a:rPr sz="1250" b="1">
                 <a:solidFill>
-                  <a:srgbClr val="F3F7FF"/>
-                </a:solidFill>
-                <a:latin typeface="Heiti TC"/>
-              </a:rPr>
-              <a:t>符合條件的摘要</a:t>
-            </a:r>
-          </a:p>
-        </p:txBody>
-      </p:sp>
-      <p:sp>
-        <p:nvSpPr>
-          <p:cNvPr id="11" name="Rectangle 10"/>
-          <p:cNvSpPr/>
-          <p:nvPr/>
-        </p:nvSpPr>
-        <p:spPr>
-          <a:xfrm>
-            <a:off x="7810499" y="2584450"/>
-            <a:ext cx="3810000" cy="825500"/>
-          </a:xfrm>
-          <a:prstGeom prst="rect">
-            <a:avLst/>
-          </a:prstGeom>
-          <a:solidFill>
-            <a:srgbClr val="111A2B"/>
-          </a:solidFill>
-          <a:ln>
-            <a:noFill/>
-          </a:ln>
-        </p:spPr>
-        <p:style>
-          <a:lnRef idx="1">
-            <a:schemeClr val="accent1"/>
-          </a:lnRef>
-          <a:fillRef idx="3">
-            <a:schemeClr val="accent1"/>
-          </a:fillRef>
-          <a:effectRef idx="2">
-            <a:schemeClr val="accent1"/>
-          </a:effectRef>
-          <a:fontRef idx="minor">
-            <a:schemeClr val="lt1"/>
-          </a:fontRef>
-        </p:style>
-        <p:txBody>
-          <a:bodyPr rtlCol="0" anchor="ctr"/>
-          <a:lstStyle/>
-          <a:p>
-            <a:pPr algn="ctr"/>
-          </a:p>
-        </p:txBody>
-      </p:sp>
-      <p:sp>
-        <p:nvSpPr>
-          <p:cNvPr id="12" name="TextBox 11"/>
-          <p:cNvSpPr txBox="1"/>
-          <p:nvPr/>
-        </p:nvSpPr>
-        <p:spPr>
-          <a:xfrm>
-            <a:off x="8001000" y="2711450"/>
-            <a:ext cx="571500" cy="260350"/>
-          </a:xfrm>
-          <a:prstGeom prst="rect">
-            <a:avLst/>
-          </a:prstGeom>
-          <a:noFill/>
-        </p:spPr>
-        <p:txBody>
-          <a:bodyPr wrap="none" lIns="0" rIns="0" tIns="0" bIns="0">
-            <a:spAutoFit/>
-          </a:bodyPr>
-          <a:lstStyle/>
-          <a:p>
-            <a:pPr>
-              <a:lnSpc>
-                <a:spcPts val="1650"/>
-              </a:lnSpc>
-              <a:spcBef>
-                <a:spcPts val="0"/>
-              </a:spcBef>
-              <a:spcAft>
-                <a:spcPts val="0"/>
-              </a:spcAft>
-            </a:pPr>
-            <a:r>
-              <a:rPr sz="1350" b="1">
-                <a:solidFill>
-                  <a:srgbClr val="35E5C5"/>
-                </a:solidFill>
-                <a:latin typeface="Heiti TC"/>
-              </a:rPr>
-              <a:t>02</a:t>
-            </a:r>
-          </a:p>
-        </p:txBody>
-      </p:sp>
-      <p:sp>
-        <p:nvSpPr>
-          <p:cNvPr id="13" name="TextBox 12"/>
-          <p:cNvSpPr txBox="1"/>
-          <p:nvPr/>
-        </p:nvSpPr>
-        <p:spPr>
-          <a:xfrm>
-            <a:off x="8001000" y="2997200"/>
-            <a:ext cx="3397250" cy="247649"/>
-          </a:xfrm>
-          <a:prstGeom prst="rect">
-            <a:avLst/>
-          </a:prstGeom>
-          <a:noFill/>
-        </p:spPr>
-        <p:txBody>
-          <a:bodyPr wrap="none" lIns="0" rIns="0" tIns="0" bIns="0">
-            <a:spAutoFit/>
-          </a:bodyPr>
-          <a:lstStyle/>
-          <a:p>
-            <a:pPr>
-              <a:lnSpc>
-                <a:spcPts val="1550"/>
-              </a:lnSpc>
-              <a:spcBef>
-                <a:spcPts val="0"/>
-              </a:spcBef>
-              <a:spcAft>
-                <a:spcPts val="0"/>
-              </a:spcAft>
-            </a:pPr>
-            <a:r>
-              <a:rPr sz="1250" b="1">
-                <a:solidFill>
-                  <a:srgbClr val="F3F7FF"/>
-                </a:solidFill>
-                <a:latin typeface="Heiti TC"/>
-              </a:rPr>
-              <a:t>使用錢包核准</a:t>
-            </a:r>
-          </a:p>
-        </p:txBody>
-      </p:sp>
-      <p:sp>
-        <p:nvSpPr>
-          <p:cNvPr id="14" name="Rectangle 13"/>
-          <p:cNvSpPr/>
-          <p:nvPr/>
-        </p:nvSpPr>
-        <p:spPr>
-          <a:xfrm>
-            <a:off x="7810499" y="3676649"/>
-            <a:ext cx="3810000" cy="825500"/>
-          </a:xfrm>
-          <a:prstGeom prst="rect">
-            <a:avLst/>
-          </a:prstGeom>
-          <a:solidFill>
-            <a:srgbClr val="111A2B"/>
-          </a:solidFill>
-          <a:ln>
-            <a:noFill/>
-          </a:ln>
-        </p:spPr>
-        <p:style>
-          <a:lnRef idx="1">
-            <a:schemeClr val="accent1"/>
-          </a:lnRef>
-          <a:fillRef idx="3">
-            <a:schemeClr val="accent1"/>
-          </a:fillRef>
-          <a:effectRef idx="2">
-            <a:schemeClr val="accent1"/>
-          </a:effectRef>
-          <a:fontRef idx="minor">
-            <a:schemeClr val="lt1"/>
-          </a:fontRef>
-        </p:style>
-        <p:txBody>
-          <a:bodyPr rtlCol="0" anchor="ctr"/>
-          <a:lstStyle/>
-          <a:p>
-            <a:pPr algn="ctr"/>
-          </a:p>
-        </p:txBody>
-      </p:sp>
-      <p:sp>
-        <p:nvSpPr>
-          <p:cNvPr id="15" name="TextBox 14"/>
-          <p:cNvSpPr txBox="1"/>
-          <p:nvPr/>
-        </p:nvSpPr>
-        <p:spPr>
-          <a:xfrm>
-            <a:off x="8001000" y="3803650"/>
-            <a:ext cx="571500" cy="260350"/>
-          </a:xfrm>
-          <a:prstGeom prst="rect">
-            <a:avLst/>
-          </a:prstGeom>
-          <a:noFill/>
-        </p:spPr>
-        <p:txBody>
-          <a:bodyPr wrap="none" lIns="0" rIns="0" tIns="0" bIns="0">
-            <a:spAutoFit/>
-          </a:bodyPr>
-          <a:lstStyle/>
-          <a:p>
-            <a:pPr>
-              <a:lnSpc>
-                <a:spcPts val="1650"/>
-              </a:lnSpc>
-              <a:spcBef>
-                <a:spcPts val="0"/>
-              </a:spcBef>
-              <a:spcAft>
-                <a:spcPts val="0"/>
-              </a:spcAft>
-            </a:pPr>
-            <a:r>
-              <a:rPr sz="1350" b="1">
-                <a:solidFill>
-                  <a:srgbClr val="35E5C5"/>
-                </a:solidFill>
-                <a:latin typeface="Heiti TC"/>
-              </a:rPr>
-              <a:t>03</a:t>
-            </a:r>
-          </a:p>
-        </p:txBody>
-      </p:sp>
-      <p:sp>
-        <p:nvSpPr>
-          <p:cNvPr id="16" name="TextBox 15"/>
-          <p:cNvSpPr txBox="1"/>
-          <p:nvPr/>
-        </p:nvSpPr>
-        <p:spPr>
-          <a:xfrm>
-            <a:off x="8001000" y="4089400"/>
-            <a:ext cx="3397250" cy="247649"/>
-          </a:xfrm>
-          <a:prstGeom prst="rect">
-            <a:avLst/>
-          </a:prstGeom>
-          <a:noFill/>
-        </p:spPr>
-        <p:txBody>
-          <a:bodyPr wrap="none" lIns="0" rIns="0" tIns="0" bIns="0">
-            <a:spAutoFit/>
-          </a:bodyPr>
-          <a:lstStyle/>
-          <a:p>
-            <a:pPr>
-              <a:lnSpc>
-                <a:spcPts val="1550"/>
-              </a:lnSpc>
-              <a:spcBef>
-                <a:spcPts val="0"/>
-              </a:spcBef>
-              <a:spcAft>
-                <a:spcPts val="0"/>
-              </a:spcAft>
-            </a:pPr>
-            <a:r>
-              <a:rPr sz="1250" b="1">
-                <a:solidFill>
-                  <a:srgbClr val="F3F7FF"/>
-                </a:solidFill>
-                <a:latin typeface="Heiti TC"/>
-              </a:rPr>
-              <a:t>Devnet 鏈上查證</a:t>
-            </a:r>
-          </a:p>
-        </p:txBody>
-      </p:sp>
-      <p:sp>
-        <p:nvSpPr>
-          <p:cNvPr id="17" name="TextBox 16"/>
-          <p:cNvSpPr txBox="1"/>
-          <p:nvPr/>
-        </p:nvSpPr>
-        <p:spPr>
-          <a:xfrm>
-            <a:off x="539750" y="5353050"/>
-            <a:ext cx="11112500" cy="247649"/>
-          </a:xfrm>
-          <a:prstGeom prst="rect">
-            <a:avLst/>
-          </a:prstGeom>
-          <a:noFill/>
-        </p:spPr>
-        <p:txBody>
-          <a:bodyPr wrap="none" lIns="0" rIns="0" tIns="0" bIns="0">
-            <a:spAutoFit/>
-          </a:bodyPr>
-          <a:lstStyle/>
-          <a:p>
-            <a:pPr>
-              <a:lnSpc>
-                <a:spcPts val="1550"/>
-              </a:lnSpc>
-              <a:spcBef>
-                <a:spcPts val="0"/>
-              </a:spcBef>
-              <a:spcAft>
-                <a:spcPts val="0"/>
-              </a:spcAft>
-            </a:pPr>
-            <a:r>
-              <a:rPr sz="1250" b="1">
-                <a:solidFill>
                   <a:srgbClr val="FFD080"/>
                 </a:solidFill>
                 <a:latin typeface="Heiti TC"/>
               </a:rPr>
-              <a:t>流程概念說明</a:t>
+              <a:t>真實申領 · 交易 5QawZy2B… · DEVNET</a:t>
             </a:r>
           </a:p>
         </p:txBody>
@@ -9219,7 +8980,7 @@
       </p:sp>
       <p:pic>
         <p:nvPicPr>
-          <p:cNvPr id="9" name="Picture 8" descr="2026-10-02_c14_s06_nft-first5k-detail.png"/>
+          <p:cNvPr id="9" name="Picture 8" descr="2026-10-06_c21_s06_nft-first5k-detail.png"/>
           <p:cNvPicPr>
             <a:picLocks noChangeAspect="1"/>
           </p:cNvPicPr>
@@ -9281,7 +9042,7 @@
                 </a:solidFill>
                 <a:latin typeface="Heiti TC"/>
               </a:rPr>
-              <a:t>實機截圖 · 10/2 · APK 版本代碼 14</a:t>
+              <a:t>實機截圖 · 10/6 · APK 版本代碼 21</a:t>
             </a:r>
           </a:p>
         </p:txBody>
@@ -10704,7 +10465,7 @@
       </p:sp>
       <p:pic>
         <p:nvPicPr>
-          <p:cNvPr id="9" name="Picture 8" descr="2026-10-02_c14_s09_elephant-habitat.png"/>
+          <p:cNvPr id="9" name="Picture 8" descr="2026-10-06_c21_s09_elephant-habitat.png"/>
           <p:cNvPicPr>
             <a:picLocks noChangeAspect="1"/>
           </p:cNvPicPr>
@@ -10766,7 +10527,7 @@
                 </a:solidFill>
                 <a:latin typeface="Heiti TC"/>
               </a:rPr>
-              <a:t>實機截圖 · 10/2 · APK 版本代碼 14</a:t>
+              <a:t>實機截圖 · 10/6 · APK 版本代碼 21</a:t>
             </a:r>
           </a:p>
         </p:txBody>

--- a/output/hackathon-flexclip-en/flexclip-v4/NeonShift_FlexClip_v4_ZH-TW_Review.pptx
+++ b/output/hackathon-flexclip-en/flexclip-v4/NeonShift_FlexClip_v4_ZH-TW_Review.pptx
@@ -8437,7 +8437,7 @@
       </p:sp>
       <p:pic>
         <p:nvPicPr>
-          <p:cNvPr id="9" name="Picture 8" descr="2026-10-06_c21_s05_claim-1-wallet-approve.png"/>
+          <p:cNvPr id="9" name="Picture 8" descr="2026-10-07_c22_s05_claim-1-wallet-approve.png"/>
           <p:cNvPicPr>
             <a:picLocks noChangeAspect="1"/>
           </p:cNvPicPr>
@@ -8461,7 +8461,7 @@
       </p:pic>
       <p:pic>
         <p:nvPicPr>
-          <p:cNvPr id="10" name="Picture 9" descr="2026-10-06_c21_s05_claim-2-step-claimed.png"/>
+          <p:cNvPr id="10" name="Picture 9" descr="2026-10-07_c22_s05_claim-2-step-claimed.png"/>
           <p:cNvPicPr>
             <a:picLocks noChangeAspect="1"/>
           </p:cNvPicPr>
@@ -8485,7 +8485,7 @@
       </p:pic>
       <p:pic>
         <p:nvPicPr>
-          <p:cNvPr id="11" name="Picture 10" descr="2026-10-06_c21_s05_claim-3-today-2of2.png"/>
+          <p:cNvPr id="11" name="Picture 10" descr="2026-10-07_c22_s05_claim-3-home-35.png"/>
           <p:cNvPicPr>
             <a:picLocks noChangeAspect="1"/>
           </p:cNvPicPr>
@@ -8547,7 +8547,7 @@
                 </a:solidFill>
                 <a:latin typeface="Heiti TC"/>
               </a:rPr>
-              <a:t>實機截圖 · 10/6 · APK 版本代碼 21</a:t>
+              <a:t>實機截圖 · 10/7 · APK 版本代碼 22</a:t>
             </a:r>
           </a:p>
         </p:txBody>
@@ -8592,7 +8592,7 @@
                 </a:solidFill>
                 <a:latin typeface="Heiti TC"/>
               </a:rPr>
-              <a:t>真實申領 · 交易 5QawZy2B… · DEVNET</a:t>
+              <a:t>真實申領 · 交易 3PpfNbBr… · DEVNET</a:t>
             </a:r>
           </a:p>
         </p:txBody>
